--- a/content/decks/a-level-art-design/9479-s1-a3-development.pptx
+++ b/content/decks/a-level-art-design/9479-s1-a3-development.pptx
@@ -4080,7 +4080,7 @@
       </p:grpSpPr>
       <p:pic>
         <p:nvPicPr>
-          <p:cNvPr id="2" name="Image 0" descr="/private/tmp/claude-501/-Users-dogan-Documents-Vaults-Courses/3954bcc8-cc8d-4110-bd5a-74962061a805/scratchpad/decks/img/crops/repin-stoking-fire_a1777.jpg">    </p:cNvPr>
+          <p:cNvPr id="2" name="Image 0" descr="/Users/dogan/Documents/Vaults/Courses/wiki/classes/a-level-art-design/decks/_build/img/crops/repin-stoking-fire_a1777.jpg">    </p:cNvPr>
           <p:cNvPicPr>
             <a:picLocks noChangeAspect="1"/>
           </p:cNvPicPr>
@@ -4901,7 +4901,7 @@
       </p:grpSpPr>
       <p:pic>
         <p:nvPicPr>
-          <p:cNvPr id="2" name="Image 0" descr="/private/tmp/claude-501/-Users-dogan-Documents-Vaults-Courses/3954bcc8-cc8d-4110-bd5a-74962061a805/scratchpad/decks/img/crops/repin-tolstoy_a691.jpg">    </p:cNvPr>
+          <p:cNvPr id="2" name="Image 0" descr="/Users/dogan/Documents/Vaults/Courses/wiki/classes/a-level-art-design/decks/_build/img/crops/repin-tolstoy_a691.jpg">    </p:cNvPr>
           <p:cNvPicPr>
             <a:picLocks noChangeAspect="1"/>
           </p:cNvPicPr>
@@ -5504,7 +5504,7 @@
       </p:sp>
       <p:pic>
         <p:nvPicPr>
-          <p:cNvPr id="7" name="Image 0" descr="/private/tmp/claude-501/-Users-dogan-Documents-Vaults-Courses/3954bcc8-cc8d-4110-bd5a-74962061a805/scratchpad/decks/img/rubens-anatomical-studies.jpg">    </p:cNvPr>
+          <p:cNvPr id="7" name="Image 0" descr="/Users/dogan/Documents/Vaults/Courses/wiki/classes/a-level-art-design/decks/_build/img/rubens-anatomical-studies.jpg">    </p:cNvPr>
           <p:cNvPicPr>
             <a:picLocks noChangeAspect="1"/>
           </p:cNvPicPr>
@@ -5631,7 +5631,7 @@
       </p:sp>
       <p:pic>
         <p:nvPicPr>
-          <p:cNvPr id="11" name="Image 1" descr="/private/tmp/claude-501/-Users-dogan-Documents-Vaults-Courses/3954bcc8-cc8d-4110-bd5a-74962061a805/scratchpad/decks/img/repin-naked-sketch.jpg">    </p:cNvPr>
+          <p:cNvPr id="11" name="Image 1" descr="/Users/dogan/Documents/Vaults/Courses/wiki/classes/a-level-art-design/decks/_build/img/repin-magdalena.jpg">    </p:cNvPr>
           <p:cNvPicPr>
             <a:picLocks noChangeAspect="1"/>
           </p:cNvPicPr>
@@ -5645,8 +5645,8 @@
         </p:blipFill>
         <p:spPr>
           <a:xfrm>
-            <a:off x="5141020" y="1728216"/>
-            <a:ext cx="1906911" cy="2944368"/>
+            <a:off x="5118505" y="1728216"/>
+            <a:ext cx="1951943" cy="2944368"/>
           </a:xfrm>
           <a:prstGeom prst="rect">
             <a:avLst/>
@@ -5758,7 +5758,7 @@
       </p:sp>
       <p:pic>
         <p:nvPicPr>
-          <p:cNvPr id="15" name="Image 2" descr="/private/tmp/claude-501/-Users-dogan-Documents-Vaults-Courses/3954bcc8-cc8d-4110-bd5a-74962061a805/scratchpad/decks/img/bosschaert-bouquet.jpg">    </p:cNvPr>
+          <p:cNvPr id="15" name="Image 2" descr="/Users/dogan/Documents/Vaults/Courses/wiki/classes/a-level-art-design/decks/_build/img/bosschaert-bouquet.jpg">    </p:cNvPr>
           <p:cNvPicPr>
             <a:picLocks noChangeAspect="1"/>
           </p:cNvPicPr>
